--- a/docs/mini-nowcast-intro.pptx
+++ b/docs/mini-nowcast-intro.pptx
@@ -1035,7 +1035,7 @@
     <p:bg>
       <p:bgPr>
         <a:solidFill>
-          <a:srgbClr val="1E2761"/>
+          <a:srgbClr val="434E60"/>
         </a:solidFill>
       </p:bgPr>
     </p:bg>
@@ -1080,7 +1080,7 @@
             <a:r>
               <a:rPr lang="en-US" sz="1600" spc="200" kern="0" dirty="0">
                 <a:solidFill>
-                  <a:srgbClr val="8FB3E8"/>
+                  <a:srgbClr val="AEBACB"/>
                 </a:solidFill>
                 <a:latin typeface="Yu Gothic" pitchFamily="34" charset="0"/>
                 <a:ea typeface="Yu Gothic" pitchFamily="34" charset="-122"/>
@@ -1139,7 +1139,7 @@
             <a:r>
               <a:rPr lang="en-US" sz="3000" dirty="0">
                 <a:solidFill>
-                  <a:srgbClr val="CADCFC"/>
+                  <a:srgbClr val="DCE2EA"/>
                 </a:solidFill>
                 <a:latin typeface="Yu Gothic" pitchFamily="34" charset="0"/>
                 <a:ea typeface="Yu Gothic" pitchFamily="34" charset="-122"/>
@@ -1159,7 +1159,7 @@
             <a:r>
               <a:rPr lang="en-US" sz="3000" dirty="0">
                 <a:solidFill>
-                  <a:srgbClr val="CADCFC"/>
+                  <a:srgbClr val="DCE2EA"/>
                 </a:solidFill>
                 <a:latin typeface="Yu Gothic" pitchFamily="34" charset="0"/>
                 <a:ea typeface="Yu Gothic" pitchFamily="34" charset="-122"/>
@@ -1193,7 +1193,7 @@
             <a:r>
               <a:rPr lang="en-US" sz="3000" dirty="0">
                 <a:solidFill>
-                  <a:srgbClr val="CADCFC"/>
+                  <a:srgbClr val="DCE2EA"/>
                 </a:solidFill>
                 <a:latin typeface="Yu Gothic" pitchFamily="34" charset="0"/>
                 <a:ea typeface="Yu Gothic" pitchFamily="34" charset="-122"/>
@@ -1222,7 +1222,7 @@
             </a:avLst>
           </a:prstGeom>
           <a:solidFill>
-            <a:srgbClr val="2E3C7A"/>
+            <a:srgbClr val="556175"/>
           </a:solidFill>
           <a:ln/>
         </p:spPr>
@@ -1293,7 +1293,7 @@
             <a:r>
               <a:rPr lang="en-US" sz="1200" dirty="0">
                 <a:solidFill>
-                  <a:srgbClr val="8FB3E8"/>
+                  <a:srgbClr val="AEBACB"/>
                 </a:solidFill>
                 <a:latin typeface="Yu Gothic" pitchFamily="34" charset="0"/>
                 <a:ea typeface="Yu Gothic" pitchFamily="34" charset="-122"/>
@@ -1322,7 +1322,7 @@
             </a:avLst>
           </a:prstGeom>
           <a:solidFill>
-            <a:srgbClr val="2E3C7A"/>
+            <a:srgbClr val="556175"/>
           </a:solidFill>
           <a:ln/>
         </p:spPr>
@@ -1393,7 +1393,7 @@
             <a:r>
               <a:rPr lang="en-US" sz="1200" dirty="0">
                 <a:solidFill>
-                  <a:srgbClr val="8FB3E8"/>
+                  <a:srgbClr val="AEBACB"/>
                 </a:solidFill>
                 <a:latin typeface="Yu Gothic" pitchFamily="34" charset="0"/>
                 <a:ea typeface="Yu Gothic" pitchFamily="34" charset="-122"/>
@@ -1422,7 +1422,7 @@
             </a:avLst>
           </a:prstGeom>
           <a:solidFill>
-            <a:srgbClr val="2E3C7A"/>
+            <a:srgbClr val="556175"/>
           </a:solidFill>
           <a:ln/>
         </p:spPr>
@@ -1493,7 +1493,7 @@
             <a:r>
               <a:rPr lang="en-US" sz="1200" dirty="0">
                 <a:solidFill>
-                  <a:srgbClr val="8FB3E8"/>
+                  <a:srgbClr val="AEBACB"/>
                 </a:solidFill>
                 <a:latin typeface="Yu Gothic" pitchFamily="34" charset="0"/>
                 <a:ea typeface="Yu Gothic" pitchFamily="34" charset="-122"/>
@@ -1556,7 +1556,7 @@
             <a:r>
               <a:rPr lang="en-US" sz="1100" dirty="0">
                 <a:solidFill>
-                  <a:srgbClr val="8FB3E8"/>
+                  <a:srgbClr val="AEBACB"/>
                 </a:solidFill>
                 <a:latin typeface="Yu Gothic" pitchFamily="34" charset="0"/>
                 <a:ea typeface="Yu Gothic" pitchFamily="34" charset="-122"/>
@@ -1627,7 +1627,7 @@
             <a:r>
               <a:rPr lang="en-US" sz="3600" b="1" dirty="0">
                 <a:solidFill>
-                  <a:srgbClr val="16203F"/>
+                  <a:srgbClr val="232A36"/>
                 </a:solidFill>
                 <a:latin typeface="Yu Gothic" pitchFamily="34" charset="0"/>
                 <a:ea typeface="Yu Gothic" pitchFamily="34" charset="-122"/>
@@ -1666,7 +1666,7 @@
             <a:r>
               <a:rPr lang="en-US" sz="1500" dirty="0">
                 <a:solidFill>
-                  <a:srgbClr val="5B6485"/>
+                  <a:srgbClr val="636C7C"/>
                 </a:solidFill>
                 <a:latin typeface="Yu Gothic" pitchFamily="34" charset="0"/>
                 <a:ea typeface="Yu Gothic" pitchFamily="34" charset="-122"/>
@@ -1705,7 +1705,7 @@
             <a:r>
               <a:rPr lang="en-US" sz="1300" b="1" dirty="0">
                 <a:solidFill>
-                  <a:srgbClr val="5B6485"/>
+                  <a:srgbClr val="636C7C"/>
                 </a:solidFill>
                 <a:latin typeface="Yu Gothic" pitchFamily="34" charset="0"/>
                 <a:ea typeface="Yu Gothic" pitchFamily="34" charset="-122"/>
@@ -1771,7 +1771,7 @@
             <a:avLst/>
           </a:prstGeom>
           <a:solidFill>
-            <a:srgbClr val="1E2761"/>
+            <a:srgbClr val="434E60"/>
           </a:solidFill>
           <a:ln/>
         </p:spPr>
@@ -1832,7 +1832,7 @@
             </a:avLst>
           </a:prstGeom>
           <a:solidFill>
-            <a:srgbClr val="F4F7FD"/>
+            <a:srgbClr val="F2F4F7"/>
           </a:solidFill>
           <a:ln/>
         </p:spPr>
@@ -1864,7 +1864,7 @@
             <a:r>
               <a:rPr lang="en-US" sz="1600" b="1" dirty="0">
                 <a:solidFill>
-                  <a:srgbClr val="1E2761"/>
+                  <a:srgbClr val="434E60"/>
                 </a:solidFill>
                 <a:latin typeface="Yu Gothic" pitchFamily="34" charset="0"/>
                 <a:ea typeface="Yu Gothic" pitchFamily="34" charset="-122"/>
@@ -1903,7 +1903,7 @@
             <a:r>
               <a:rPr lang="en-US" sz="1300" dirty="0">
                 <a:solidFill>
-                  <a:srgbClr val="5B6485"/>
+                  <a:srgbClr val="636C7C"/>
                 </a:solidFill>
                 <a:latin typeface="Yu Gothic" pitchFamily="34" charset="0"/>
                 <a:ea typeface="Yu Gothic" pitchFamily="34" charset="-122"/>
@@ -1930,7 +1930,7 @@
             <a:avLst/>
           </a:prstGeom>
           <a:solidFill>
-            <a:srgbClr val="CADCFC"/>
+            <a:srgbClr val="DCE2EA"/>
           </a:solidFill>
           <a:ln/>
         </p:spPr>
@@ -1952,7 +1952,7 @@
             </a:avLst>
           </a:prstGeom>
           <a:solidFill>
-            <a:srgbClr val="1E2761"/>
+            <a:srgbClr val="434E60"/>
           </a:solidFill>
           <a:ln/>
         </p:spPr>
@@ -2023,7 +2023,7 @@
             <a:r>
               <a:rPr lang="en-US" sz="1300" dirty="0">
                 <a:solidFill>
-                  <a:srgbClr val="CADCFC"/>
+                  <a:srgbClr val="DCE2EA"/>
                 </a:solidFill>
                 <a:latin typeface="Yu Gothic" pitchFamily="34" charset="0"/>
                 <a:ea typeface="Yu Gothic" pitchFamily="34" charset="-122"/>
@@ -2050,7 +2050,7 @@
             <a:avLst/>
           </a:prstGeom>
           <a:solidFill>
-            <a:srgbClr val="1E2761"/>
+            <a:srgbClr val="434E60"/>
           </a:solidFill>
           <a:ln/>
         </p:spPr>
@@ -2111,7 +2111,7 @@
             </a:avLst>
           </a:prstGeom>
           <a:solidFill>
-            <a:srgbClr val="F4F7FD"/>
+            <a:srgbClr val="F2F4F7"/>
           </a:solidFill>
           <a:ln/>
         </p:spPr>
@@ -2143,7 +2143,7 @@
             <a:r>
               <a:rPr lang="en-US" sz="1600" b="1" dirty="0">
                 <a:solidFill>
-                  <a:srgbClr val="1E2761"/>
+                  <a:srgbClr val="434E60"/>
                 </a:solidFill>
                 <a:latin typeface="Yu Gothic" pitchFamily="34" charset="0"/>
                 <a:ea typeface="Yu Gothic" pitchFamily="34" charset="-122"/>
@@ -2182,7 +2182,7 @@
             <a:r>
               <a:rPr lang="en-US" sz="1300" dirty="0">
                 <a:solidFill>
-                  <a:srgbClr val="5B6485"/>
+                  <a:srgbClr val="636C7C"/>
                 </a:solidFill>
                 <a:latin typeface="Yu Gothic" pitchFamily="34" charset="0"/>
                 <a:ea typeface="Yu Gothic" pitchFamily="34" charset="-122"/>
@@ -2209,7 +2209,7 @@
             <a:avLst/>
           </a:prstGeom>
           <a:solidFill>
-            <a:srgbClr val="CADCFC"/>
+            <a:srgbClr val="DCE2EA"/>
           </a:solidFill>
           <a:ln/>
         </p:spPr>
@@ -2231,7 +2231,7 @@
             </a:avLst>
           </a:prstGeom>
           <a:solidFill>
-            <a:srgbClr val="1E2761"/>
+            <a:srgbClr val="434E60"/>
           </a:solidFill>
           <a:ln/>
         </p:spPr>
@@ -2302,7 +2302,7 @@
             <a:r>
               <a:rPr lang="en-US" sz="1300" dirty="0">
                 <a:solidFill>
-                  <a:srgbClr val="CADCFC"/>
+                  <a:srgbClr val="DCE2EA"/>
                 </a:solidFill>
                 <a:latin typeface="Yu Gothic" pitchFamily="34" charset="0"/>
                 <a:ea typeface="Yu Gothic" pitchFamily="34" charset="-122"/>
@@ -2341,7 +2341,7 @@
             <a:r>
               <a:rPr lang="en-US" sz="1150" dirty="0">
                 <a:solidFill>
-                  <a:srgbClr val="5B6485"/>
+                  <a:srgbClr val="636C7C"/>
                 </a:solidFill>
                 <a:latin typeface="Yu Gothic" pitchFamily="34" charset="0"/>
                 <a:ea typeface="Yu Gothic" pitchFamily="34" charset="-122"/>
@@ -2412,7 +2412,7 @@
             <a:r>
               <a:rPr lang="en-US" sz="3600" b="1" dirty="0">
                 <a:solidFill>
-                  <a:srgbClr val="16203F"/>
+                  <a:srgbClr val="232A36"/>
                 </a:solidFill>
                 <a:latin typeface="Yu Gothic" pitchFamily="34" charset="0"/>
                 <a:ea typeface="Yu Gothic" pitchFamily="34" charset="-122"/>
@@ -2451,7 +2451,7 @@
             <a:r>
               <a:rPr lang="en-US" sz="1300" b="1" dirty="0">
                 <a:solidFill>
-                  <a:srgbClr val="5B6485"/>
+                  <a:srgbClr val="636C7C"/>
                 </a:solidFill>
                 <a:latin typeface="Yu Gothic" pitchFamily="34" charset="0"/>
                 <a:ea typeface="Yu Gothic" pitchFamily="34" charset="-122"/>
@@ -2494,7 +2494,7 @@
             <a:r>
               <a:rPr lang="en-US" sz="1400" dirty="0">
                 <a:solidFill>
-                  <a:srgbClr val="16203F"/>
+                  <a:srgbClr val="232A36"/>
                 </a:solidFill>
                 <a:latin typeface="Yu Gothic" pitchFamily="34" charset="0"/>
                 <a:ea typeface="Yu Gothic" pitchFamily="34" charset="-122"/>
@@ -2515,7 +2515,7 @@
             <a:r>
               <a:rPr lang="en-US" sz="1400" dirty="0">
                 <a:solidFill>
-                  <a:srgbClr val="16203F"/>
+                  <a:srgbClr val="232A36"/>
                 </a:solidFill>
                 <a:latin typeface="Yu Gothic" pitchFamily="34" charset="0"/>
                 <a:ea typeface="Yu Gothic" pitchFamily="34" charset="-122"/>
@@ -2536,7 +2536,7 @@
             <a:r>
               <a:rPr lang="en-US" sz="1400" dirty="0">
                 <a:solidFill>
-                  <a:srgbClr val="16203F"/>
+                  <a:srgbClr val="232A36"/>
                 </a:solidFill>
                 <a:latin typeface="Yu Gothic" pitchFamily="34" charset="0"/>
                 <a:ea typeface="Yu Gothic" pitchFamily="34" charset="-122"/>
@@ -2565,7 +2565,7 @@
             </a:avLst>
           </a:prstGeom>
           <a:solidFill>
-            <a:srgbClr val="F4F7FD"/>
+            <a:srgbClr val="F2F4F7"/>
           </a:solidFill>
           <a:ln/>
         </p:spPr>
@@ -2639,7 +2639,7 @@
             <a:r>
               <a:rPr lang="en-US" sz="1300" b="1" dirty="0">
                 <a:solidFill>
-                  <a:srgbClr val="16203F"/>
+                  <a:srgbClr val="232A36"/>
                 </a:solidFill>
                 <a:latin typeface="Yu Gothic" pitchFamily="34" charset="0"/>
                 <a:ea typeface="Yu Gothic" pitchFamily="34" charset="-122"/>
@@ -2657,7 +2657,7 @@
             <a:r>
               <a:rPr lang="en-US" sz="1300" dirty="0">
                 <a:solidFill>
-                  <a:srgbClr val="5B6485"/>
+                  <a:srgbClr val="636C7C"/>
                 </a:solidFill>
                 <a:latin typeface="Yu Gothic" pitchFamily="34" charset="0"/>
                 <a:ea typeface="Yu Gothic" pitchFamily="34" charset="-122"/>
@@ -2696,7 +2696,7 @@
             <a:r>
               <a:rPr lang="en-US" sz="1300" b="1" dirty="0">
                 <a:solidFill>
-                  <a:srgbClr val="5B6485"/>
+                  <a:srgbClr val="636C7C"/>
                 </a:solidFill>
                 <a:latin typeface="Yu Gothic" pitchFamily="34" charset="0"/>
                 <a:ea typeface="Yu Gothic" pitchFamily="34" charset="-122"/>
@@ -2749,7 +2749,7 @@
             </a:avLst>
           </a:prstGeom>
           <a:solidFill>
-            <a:srgbClr val="1E2761"/>
+            <a:srgbClr val="434E60"/>
           </a:solidFill>
           <a:ln/>
         </p:spPr>
@@ -2781,7 +2781,7 @@
             <a:r>
               <a:rPr lang="en-US" sz="1300" b="1" dirty="0">
                 <a:solidFill>
-                  <a:srgbClr val="8FB3E8"/>
+                  <a:srgbClr val="AEBACB"/>
                 </a:solidFill>
                 <a:latin typeface="Yu Gothic" pitchFamily="34" charset="0"/>
                 <a:ea typeface="Yu Gothic" pitchFamily="34" charset="-122"/>
@@ -2882,7 +2882,7 @@
             <a:r>
               <a:rPr lang="en-US" sz="1100" dirty="0">
                 <a:solidFill>
-                  <a:srgbClr val="5B6485"/>
+                  <a:srgbClr val="636C7C"/>
                 </a:solidFill>
                 <a:latin typeface="Yu Gothic" pitchFamily="34" charset="0"/>
                 <a:ea typeface="Yu Gothic" pitchFamily="34" charset="-122"/>

--- a/docs/mini-nowcast-intro.pptx
+++ b/docs/mini-nowcast-intro.pptx
@@ -1035,7 +1035,7 @@
     <p:bg>
       <p:bgPr>
         <a:solidFill>
-          <a:srgbClr val="434E60"/>
+          <a:srgbClr val="FFFFFF"/>
         </a:solidFill>
       </p:bgPr>
     </p:bg>
@@ -1080,7 +1080,7 @@
             <a:r>
               <a:rPr lang="en-US" sz="1600" spc="200" kern="0" dirty="0">
                 <a:solidFill>
-                  <a:srgbClr val="AEBACB"/>
+                  <a:srgbClr val="636C7C"/>
                 </a:solidFill>
                 <a:latin typeface="Yu Gothic" pitchFamily="34" charset="0"/>
                 <a:ea typeface="Yu Gothic" pitchFamily="34" charset="-122"/>
@@ -1122,7 +1122,7 @@
             <a:r>
               <a:rPr lang="en-US" sz="3000" b="1" dirty="0">
                 <a:solidFill>
-                  <a:srgbClr val="FFFFFF"/>
+                  <a:srgbClr val="232A36"/>
                 </a:solidFill>
                 <a:latin typeface="Yu Gothic" pitchFamily="34" charset="0"/>
                 <a:ea typeface="Yu Gothic" pitchFamily="34" charset="-122"/>
@@ -1139,7 +1139,7 @@
             <a:r>
               <a:rPr lang="en-US" sz="3000" dirty="0">
                 <a:solidFill>
-                  <a:srgbClr val="DCE2EA"/>
+                  <a:srgbClr val="636C7C"/>
                 </a:solidFill>
                 <a:latin typeface="Yu Gothic" pitchFamily="34" charset="0"/>
                 <a:ea typeface="Yu Gothic" pitchFamily="34" charset="-122"/>
@@ -1159,7 +1159,7 @@
             <a:r>
               <a:rPr lang="en-US" sz="3000" dirty="0">
                 <a:solidFill>
-                  <a:srgbClr val="DCE2EA"/>
+                  <a:srgbClr val="636C7C"/>
                 </a:solidFill>
                 <a:latin typeface="Yu Gothic" pitchFamily="34" charset="0"/>
                 <a:ea typeface="Yu Gothic" pitchFamily="34" charset="-122"/>
@@ -1176,7 +1176,7 @@
             <a:r>
               <a:rPr lang="en-US" sz="3000" b="1" dirty="0">
                 <a:solidFill>
-                  <a:srgbClr val="FFFFFF"/>
+                  <a:srgbClr val="232A36"/>
                 </a:solidFill>
                 <a:latin typeface="Yu Gothic" pitchFamily="34" charset="0"/>
                 <a:ea typeface="Yu Gothic" pitchFamily="34" charset="-122"/>
@@ -1193,7 +1193,7 @@
             <a:r>
               <a:rPr lang="en-US" sz="3000" dirty="0">
                 <a:solidFill>
-                  <a:srgbClr val="DCE2EA"/>
+                  <a:srgbClr val="636C7C"/>
                 </a:solidFill>
                 <a:latin typeface="Yu Gothic" pitchFamily="34" charset="0"/>
                 <a:ea typeface="Yu Gothic" pitchFamily="34" charset="-122"/>
@@ -1222,7 +1222,7 @@
             </a:avLst>
           </a:prstGeom>
           <a:solidFill>
-            <a:srgbClr val="556175"/>
+            <a:srgbClr val="F2F4F7"/>
           </a:solidFill>
           <a:ln/>
         </p:spPr>
@@ -1254,7 +1254,7 @@
             <a:r>
               <a:rPr lang="en-US" sz="3600" b="1" dirty="0">
                 <a:solidFill>
-                  <a:srgbClr val="FFFFFF"/>
+                  <a:srgbClr val="232A36"/>
                 </a:solidFill>
                 <a:latin typeface="Yu Gothic" pitchFamily="34" charset="0"/>
                 <a:ea typeface="Yu Gothic" pitchFamily="34" charset="-122"/>
@@ -1293,7 +1293,7 @@
             <a:r>
               <a:rPr lang="en-US" sz="1200" dirty="0">
                 <a:solidFill>
-                  <a:srgbClr val="AEBACB"/>
+                  <a:srgbClr val="636C7C"/>
                 </a:solidFill>
                 <a:latin typeface="Yu Gothic" pitchFamily="34" charset="0"/>
                 <a:ea typeface="Yu Gothic" pitchFamily="34" charset="-122"/>
@@ -1322,7 +1322,7 @@
             </a:avLst>
           </a:prstGeom>
           <a:solidFill>
-            <a:srgbClr val="556175"/>
+            <a:srgbClr val="F2F4F7"/>
           </a:solidFill>
           <a:ln/>
         </p:spPr>
@@ -1354,7 +1354,7 @@
             <a:r>
               <a:rPr lang="en-US" sz="3600" b="1" dirty="0">
                 <a:solidFill>
-                  <a:srgbClr val="FFFFFF"/>
+                  <a:srgbClr val="232A36"/>
                 </a:solidFill>
                 <a:latin typeface="Yu Gothic" pitchFamily="34" charset="0"/>
                 <a:ea typeface="Yu Gothic" pitchFamily="34" charset="-122"/>
@@ -1393,7 +1393,7 @@
             <a:r>
               <a:rPr lang="en-US" sz="1200" dirty="0">
                 <a:solidFill>
-                  <a:srgbClr val="AEBACB"/>
+                  <a:srgbClr val="636C7C"/>
                 </a:solidFill>
                 <a:latin typeface="Yu Gothic" pitchFamily="34" charset="0"/>
                 <a:ea typeface="Yu Gothic" pitchFamily="34" charset="-122"/>
@@ -1422,7 +1422,7 @@
             </a:avLst>
           </a:prstGeom>
           <a:solidFill>
-            <a:srgbClr val="556175"/>
+            <a:srgbClr val="F2F4F7"/>
           </a:solidFill>
           <a:ln/>
         </p:spPr>
@@ -1454,7 +1454,7 @@
             <a:r>
               <a:rPr lang="en-US" sz="3600" b="1" dirty="0">
                 <a:solidFill>
-                  <a:srgbClr val="FFFFFF"/>
+                  <a:srgbClr val="232A36"/>
                 </a:solidFill>
                 <a:latin typeface="Yu Gothic" pitchFamily="34" charset="0"/>
                 <a:ea typeface="Yu Gothic" pitchFamily="34" charset="-122"/>
@@ -1493,7 +1493,7 @@
             <a:r>
               <a:rPr lang="en-US" sz="1200" dirty="0">
                 <a:solidFill>
-                  <a:srgbClr val="AEBACB"/>
+                  <a:srgbClr val="636C7C"/>
                 </a:solidFill>
                 <a:latin typeface="Yu Gothic" pitchFamily="34" charset="0"/>
                 <a:ea typeface="Yu Gothic" pitchFamily="34" charset="-122"/>
@@ -1556,7 +1556,7 @@
             <a:r>
               <a:rPr lang="en-US" sz="1100" dirty="0">
                 <a:solidFill>
-                  <a:srgbClr val="AEBACB"/>
+                  <a:srgbClr val="636C7C"/>
                 </a:solidFill>
                 <a:latin typeface="Yu Gothic" pitchFamily="34" charset="0"/>
                 <a:ea typeface="Yu Gothic" pitchFamily="34" charset="-122"/>
@@ -1952,7 +1952,7 @@
             </a:avLst>
           </a:prstGeom>
           <a:solidFill>
-            <a:srgbClr val="434E60"/>
+            <a:srgbClr val="FBEDE6"/>
           </a:solidFill>
           <a:ln/>
         </p:spPr>
@@ -1984,7 +1984,7 @@
             <a:r>
               <a:rPr lang="en-US" sz="1600" b="1" dirty="0">
                 <a:solidFill>
-                  <a:srgbClr val="FFFFFF"/>
+                  <a:srgbClr val="232A36"/>
                 </a:solidFill>
                 <a:latin typeface="Yu Gothic" pitchFamily="34" charset="0"/>
                 <a:ea typeface="Yu Gothic" pitchFamily="34" charset="-122"/>
@@ -2023,7 +2023,7 @@
             <a:r>
               <a:rPr lang="en-US" sz="1300" dirty="0">
                 <a:solidFill>
-                  <a:srgbClr val="DCE2EA"/>
+                  <a:srgbClr val="636C7C"/>
                 </a:solidFill>
                 <a:latin typeface="Yu Gothic" pitchFamily="34" charset="0"/>
                 <a:ea typeface="Yu Gothic" pitchFamily="34" charset="-122"/>
@@ -2231,7 +2231,7 @@
             </a:avLst>
           </a:prstGeom>
           <a:solidFill>
-            <a:srgbClr val="434E60"/>
+            <a:srgbClr val="FBEDE6"/>
           </a:solidFill>
           <a:ln/>
         </p:spPr>
@@ -2263,7 +2263,7 @@
             <a:r>
               <a:rPr lang="en-US" sz="1600" b="1" dirty="0">
                 <a:solidFill>
-                  <a:srgbClr val="FFFFFF"/>
+                  <a:srgbClr val="232A36"/>
                 </a:solidFill>
                 <a:latin typeface="Yu Gothic" pitchFamily="34" charset="0"/>
                 <a:ea typeface="Yu Gothic" pitchFamily="34" charset="-122"/>
@@ -2302,7 +2302,7 @@
             <a:r>
               <a:rPr lang="en-US" sz="1300" dirty="0">
                 <a:solidFill>
-                  <a:srgbClr val="DCE2EA"/>
+                  <a:srgbClr val="636C7C"/>
                 </a:solidFill>
                 <a:latin typeface="Yu Gothic" pitchFamily="34" charset="0"/>
                 <a:ea typeface="Yu Gothic" pitchFamily="34" charset="-122"/>
@@ -2749,7 +2749,7 @@
             </a:avLst>
           </a:prstGeom>
           <a:solidFill>
-            <a:srgbClr val="434E60"/>
+            <a:srgbClr val="FBEDE6"/>
           </a:solidFill>
           <a:ln/>
         </p:spPr>
@@ -2781,7 +2781,7 @@
             <a:r>
               <a:rPr lang="en-US" sz="1300" b="1" dirty="0">
                 <a:solidFill>
-                  <a:srgbClr val="AEBACB"/>
+                  <a:srgbClr val="EB6834"/>
                 </a:solidFill>
                 <a:latin typeface="Yu Gothic" pitchFamily="34" charset="0"/>
                 <a:ea typeface="Yu Gothic" pitchFamily="34" charset="-122"/>
@@ -2823,7 +2823,7 @@
             <a:r>
               <a:rPr lang="en-US" sz="1350" dirty="0">
                 <a:solidFill>
-                  <a:srgbClr val="FFFFFF"/>
+                  <a:srgbClr val="232A36"/>
                 </a:solidFill>
                 <a:latin typeface="Yu Gothic" pitchFamily="34" charset="0"/>
                 <a:ea typeface="Yu Gothic" pitchFamily="34" charset="-122"/>
@@ -2843,7 +2843,7 @@
             <a:r>
               <a:rPr lang="en-US" sz="1350" dirty="0">
                 <a:solidFill>
-                  <a:srgbClr val="FFFFFF"/>
+                  <a:srgbClr val="232A36"/>
                 </a:solidFill>
                 <a:latin typeface="Yu Gothic" pitchFamily="34" charset="0"/>
                 <a:ea typeface="Yu Gothic" pitchFamily="34" charset="-122"/>
